--- a/chapter10/parts/part-10-ethics-and-regulation/clip.pptx
+++ b/chapter10/parts/part-10-ethics-and-regulation/clip.pptx
@@ -4610,10 +4610,12 @@
           </a:bodyPr>
           <a:lstStyle/>
           <a:p>
-            <a:pPr>
+            <a:pPr lvl="0" marL="457200" indent="-228600">
+              <a:buFont typeface="Calibri"/>
               <a:spcAft>
                 <a:spcPts val="1000"/>
               </a:spcAft>
+              <a:buSzPct val="100000"/>
               <a:buChar char="•"/>
               <a:lnSpc>
                 <a:spcPts val="2200"/>
@@ -4630,10 +4632,12 @@
             </a:r>
           </a:p>
           <a:p>
-            <a:pPr>
+            <a:pPr lvl="0" marL="457200" indent="-228600">
+              <a:buFont typeface="Calibri"/>
               <a:spcAft>
                 <a:spcPts val="1000"/>
               </a:spcAft>
+              <a:buSzPct val="100000"/>
               <a:buChar char="•"/>
               <a:lnSpc>
                 <a:spcPts val="2200"/>
@@ -4650,10 +4654,12 @@
             </a:r>
           </a:p>
           <a:p>
-            <a:pPr>
+            <a:pPr lvl="0" marL="457200" indent="-228600">
+              <a:buFont typeface="Calibri"/>
               <a:spcAft>
                 <a:spcPts val="1000"/>
               </a:spcAft>
+              <a:buSzPct val="100000"/>
               <a:buChar char="•"/>
               <a:lnSpc>
                 <a:spcPts val="2200"/>
@@ -4670,10 +4676,12 @@
             </a:r>
           </a:p>
           <a:p>
-            <a:pPr>
+            <a:pPr lvl="0" marL="457200" indent="-228600">
+              <a:buFont typeface="Calibri"/>
               <a:spcAft>
                 <a:spcPts val="1000"/>
               </a:spcAft>
+              <a:buSzPct val="100000"/>
               <a:buChar char="•"/>
               <a:lnSpc>
                 <a:spcPts val="2200"/>
@@ -4809,10 +4817,12 @@
           </a:bodyPr>
           <a:lstStyle/>
           <a:p>
-            <a:pPr>
+            <a:pPr lvl="0" marL="457200" indent="-228600">
+              <a:buFont typeface="Calibri"/>
               <a:spcAft>
                 <a:spcPts val="1000"/>
               </a:spcAft>
+              <a:buSzPct val="100000"/>
               <a:buChar char="•"/>
               <a:lnSpc>
                 <a:spcPts val="2200"/>
@@ -4829,10 +4839,12 @@
             </a:r>
           </a:p>
           <a:p>
-            <a:pPr>
+            <a:pPr lvl="0" marL="457200" indent="-228600">
+              <a:buFont typeface="Calibri"/>
               <a:spcAft>
                 <a:spcPts val="1000"/>
               </a:spcAft>
+              <a:buSzPct val="100000"/>
               <a:buChar char="•"/>
               <a:lnSpc>
                 <a:spcPts val="2200"/>
@@ -4968,10 +4980,12 @@
           </a:bodyPr>
           <a:lstStyle/>
           <a:p>
-            <a:pPr>
+            <a:pPr lvl="0" marL="457200" indent="-228600">
+              <a:buFont typeface="Calibri"/>
               <a:spcAft>
                 <a:spcPts val="1000"/>
               </a:spcAft>
+              <a:buSzPct val="100000"/>
               <a:buChar char="•"/>
               <a:lnSpc>
                 <a:spcPts val="2200"/>
@@ -4988,10 +5002,12 @@
             </a:r>
           </a:p>
           <a:p>
-            <a:pPr>
+            <a:pPr lvl="0" marL="457200" indent="-228600">
+              <a:buFont typeface="Calibri"/>
               <a:spcAft>
                 <a:spcPts val="1000"/>
               </a:spcAft>
+              <a:buSzPct val="100000"/>
               <a:buChar char="•"/>
               <a:lnSpc>
                 <a:spcPts val="2200"/>
@@ -5008,10 +5024,12 @@
             </a:r>
           </a:p>
           <a:p>
-            <a:pPr>
+            <a:pPr lvl="0" marL="457200" indent="-228600">
+              <a:buFont typeface="Calibri"/>
               <a:spcAft>
                 <a:spcPts val="1000"/>
               </a:spcAft>
+              <a:buSzPct val="100000"/>
               <a:buChar char="•"/>
               <a:lnSpc>
                 <a:spcPts val="2200"/>
@@ -5028,10 +5046,12 @@
             </a:r>
           </a:p>
           <a:p>
-            <a:pPr>
+            <a:pPr lvl="0" marL="457200" indent="-228600">
+              <a:buFont typeface="Calibri"/>
               <a:spcAft>
                 <a:spcPts val="1000"/>
               </a:spcAft>
+              <a:buSzPct val="100000"/>
               <a:buChar char="•"/>
               <a:lnSpc>
                 <a:spcPts val="2200"/>
@@ -5167,10 +5187,12 @@
           </a:bodyPr>
           <a:lstStyle/>
           <a:p>
-            <a:pPr>
+            <a:pPr lvl="0" marL="457200" indent="-228600">
+              <a:buFont typeface="Calibri"/>
               <a:spcAft>
                 <a:spcPts val="1000"/>
               </a:spcAft>
+              <a:buSzPct val="100000"/>
               <a:buChar char="•"/>
               <a:lnSpc>
                 <a:spcPts val="2200"/>
@@ -5187,10 +5209,12 @@
             </a:r>
           </a:p>
           <a:p>
-            <a:pPr>
+            <a:pPr lvl="0" marL="457200" indent="-228600">
+              <a:buFont typeface="Calibri"/>
               <a:spcAft>
                 <a:spcPts val="1000"/>
               </a:spcAft>
+              <a:buSzPct val="100000"/>
               <a:buChar char="•"/>
               <a:lnSpc>
                 <a:spcPts val="2200"/>
@@ -5207,10 +5231,12 @@
             </a:r>
           </a:p>
           <a:p>
-            <a:pPr>
+            <a:pPr lvl="0" marL="457200" indent="-228600">
+              <a:buFont typeface="Calibri"/>
               <a:spcAft>
                 <a:spcPts val="1000"/>
               </a:spcAft>
+              <a:buSzPct val="100000"/>
               <a:buChar char="•"/>
               <a:lnSpc>
                 <a:spcPts val="2200"/>
@@ -5346,10 +5372,12 @@
           </a:bodyPr>
           <a:lstStyle/>
           <a:p>
-            <a:pPr>
+            <a:pPr lvl="0" marL="457200" indent="-228600">
+              <a:buFont typeface="Calibri"/>
               <a:spcAft>
                 <a:spcPts val="1000"/>
               </a:spcAft>
+              <a:buSzPct val="100000"/>
               <a:buChar char="•"/>
               <a:lnSpc>
                 <a:spcPts val="2200"/>
@@ -5366,10 +5394,12 @@
             </a:r>
           </a:p>
           <a:p>
-            <a:pPr>
+            <a:pPr lvl="0" marL="457200" indent="-228600">
+              <a:buFont typeface="Calibri"/>
               <a:spcAft>
                 <a:spcPts val="1000"/>
               </a:spcAft>
+              <a:buSzPct val="100000"/>
               <a:buChar char="•"/>
               <a:lnSpc>
                 <a:spcPts val="2200"/>
@@ -5505,10 +5535,12 @@
           </a:bodyPr>
           <a:lstStyle/>
           <a:p>
-            <a:pPr>
+            <a:pPr lvl="0" marL="457200" indent="-228600">
+              <a:buFont typeface="Calibri"/>
               <a:spcAft>
                 <a:spcPts val="1000"/>
               </a:spcAft>
+              <a:buSzPct val="100000"/>
               <a:buChar char="•"/>
               <a:lnSpc>
                 <a:spcPts val="2200"/>
@@ -5644,10 +5676,12 @@
           </a:bodyPr>
           <a:lstStyle/>
           <a:p>
-            <a:pPr>
+            <a:pPr lvl="0" marL="457200" indent="-228600">
+              <a:buFont typeface="Calibri"/>
               <a:spcAft>
                 <a:spcPts val="1000"/>
               </a:spcAft>
+              <a:buSzPct val="100000"/>
               <a:buChar char="•"/>
               <a:lnSpc>
                 <a:spcPts val="2200"/>
@@ -5664,10 +5698,12 @@
             </a:r>
           </a:p>
           <a:p>
-            <a:pPr>
+            <a:pPr lvl="0" marL="457200" indent="-228600">
+              <a:buFont typeface="Calibri"/>
               <a:spcAft>
                 <a:spcPts val="1000"/>
               </a:spcAft>
+              <a:buSzPct val="100000"/>
               <a:buChar char="•"/>
               <a:lnSpc>
                 <a:spcPts val="2200"/>
@@ -5803,10 +5839,12 @@
           </a:bodyPr>
           <a:lstStyle/>
           <a:p>
-            <a:pPr>
+            <a:pPr lvl="0" marL="457200" indent="-228600">
+              <a:buFont typeface="Calibri"/>
               <a:spcAft>
                 <a:spcPts val="1000"/>
               </a:spcAft>
+              <a:buSzPct val="100000"/>
               <a:buChar char="•"/>
               <a:lnSpc>
                 <a:spcPts val="2200"/>
@@ -5823,10 +5861,12 @@
             </a:r>
           </a:p>
           <a:p>
-            <a:pPr>
+            <a:pPr lvl="0" marL="457200" indent="-228600">
+              <a:buFont typeface="Calibri"/>
               <a:spcAft>
                 <a:spcPts val="1000"/>
               </a:spcAft>
+              <a:buSzPct val="100000"/>
               <a:buChar char="•"/>
               <a:lnSpc>
                 <a:spcPts val="2200"/>
@@ -5843,10 +5883,12 @@
             </a:r>
           </a:p>
           <a:p>
-            <a:pPr>
+            <a:pPr lvl="0" marL="457200" indent="-228600">
+              <a:buFont typeface="Calibri"/>
               <a:spcAft>
                 <a:spcPts val="1000"/>
               </a:spcAft>
+              <a:buSzPct val="100000"/>
               <a:buChar char="•"/>
               <a:lnSpc>
                 <a:spcPts val="2200"/>
@@ -5982,10 +6024,12 @@
           </a:bodyPr>
           <a:lstStyle/>
           <a:p>
-            <a:pPr>
+            <a:pPr lvl="0" marL="457200" indent="-228600">
+              <a:buFont typeface="Calibri"/>
               <a:spcAft>
                 <a:spcPts val="1000"/>
               </a:spcAft>
+              <a:buSzPct val="100000"/>
               <a:buChar char="•"/>
               <a:lnSpc>
                 <a:spcPts val="2200"/>
@@ -6002,10 +6046,12 @@
             </a:r>
           </a:p>
           <a:p>
-            <a:pPr>
+            <a:pPr lvl="0" marL="457200" indent="-228600">
+              <a:buFont typeface="Calibri"/>
               <a:spcAft>
                 <a:spcPts val="1000"/>
               </a:spcAft>
+              <a:buSzPct val="100000"/>
               <a:buChar char="•"/>
               <a:lnSpc>
                 <a:spcPts val="2200"/>
@@ -6022,10 +6068,12 @@
             </a:r>
           </a:p>
           <a:p>
-            <a:pPr>
+            <a:pPr lvl="0" marL="457200" indent="-228600">
+              <a:buFont typeface="Calibri"/>
               <a:spcAft>
                 <a:spcPts val="1000"/>
               </a:spcAft>
+              <a:buSzPct val="100000"/>
               <a:buChar char="•"/>
               <a:lnSpc>
                 <a:spcPts val="2200"/>
@@ -6042,10 +6090,12 @@
             </a:r>
           </a:p>
           <a:p>
-            <a:pPr>
+            <a:pPr lvl="0" marL="457200" indent="-228600">
+              <a:buFont typeface="Calibri"/>
               <a:spcAft>
                 <a:spcPts val="1000"/>
               </a:spcAft>
+              <a:buSzPct val="100000"/>
               <a:buChar char="•"/>
               <a:lnSpc>
                 <a:spcPts val="2200"/>
@@ -6062,10 +6112,12 @@
             </a:r>
           </a:p>
           <a:p>
-            <a:pPr>
+            <a:pPr lvl="0" marL="457200" indent="-228600">
+              <a:buFont typeface="Calibri"/>
               <a:spcAft>
                 <a:spcPts val="1000"/>
               </a:spcAft>
+              <a:buSzPct val="100000"/>
               <a:buChar char="•"/>
               <a:lnSpc>
                 <a:spcPts val="2200"/>
@@ -6201,10 +6253,12 @@
           </a:bodyPr>
           <a:lstStyle/>
           <a:p>
-            <a:pPr>
+            <a:pPr lvl="0" marL="457200" indent="-228600">
+              <a:buFont typeface="Calibri"/>
               <a:spcAft>
                 <a:spcPts val="1000"/>
               </a:spcAft>
+              <a:buSzPct val="100000"/>
               <a:buChar char="•"/>
               <a:lnSpc>
                 <a:spcPts val="2200"/>
@@ -6221,10 +6275,12 @@
             </a:r>
           </a:p>
           <a:p>
-            <a:pPr>
+            <a:pPr lvl="0" marL="457200" indent="-228600">
+              <a:buFont typeface="Calibri"/>
               <a:spcAft>
                 <a:spcPts val="1000"/>
               </a:spcAft>
+              <a:buSzPct val="100000"/>
               <a:buChar char="•"/>
               <a:lnSpc>
                 <a:spcPts val="2200"/>
@@ -6360,10 +6416,12 @@
           </a:bodyPr>
           <a:lstStyle/>
           <a:p>
-            <a:pPr>
+            <a:pPr lvl="0" marL="457200" indent="-228600">
+              <a:buFont typeface="Calibri"/>
               <a:spcAft>
                 <a:spcPts val="1000"/>
               </a:spcAft>
+              <a:buSzPct val="100000"/>
               <a:buChar char="•"/>
               <a:lnSpc>
                 <a:spcPts val="2200"/>
@@ -6380,10 +6438,12 @@
             </a:r>
           </a:p>
           <a:p>
-            <a:pPr>
+            <a:pPr lvl="0" marL="457200" indent="-228600">
+              <a:buFont typeface="Calibri"/>
               <a:spcAft>
                 <a:spcPts val="1000"/>
               </a:spcAft>
+              <a:buSzPct val="100000"/>
               <a:buChar char="•"/>
               <a:lnSpc>
                 <a:spcPts val="2200"/>
@@ -6400,10 +6460,12 @@
             </a:r>
           </a:p>
           <a:p>
-            <a:pPr>
+            <a:pPr lvl="0" marL="457200" indent="-228600">
+              <a:buFont typeface="Calibri"/>
               <a:spcAft>
                 <a:spcPts val="1000"/>
               </a:spcAft>
+              <a:buSzPct val="100000"/>
               <a:buChar char="•"/>
               <a:lnSpc>
                 <a:spcPts val="2200"/>
@@ -6420,10 +6482,12 @@
             </a:r>
           </a:p>
           <a:p>
-            <a:pPr>
+            <a:pPr lvl="0" marL="457200" indent="-228600">
+              <a:buFont typeface="Calibri"/>
               <a:spcAft>
                 <a:spcPts val="1000"/>
               </a:spcAft>
+              <a:buSzPct val="100000"/>
               <a:buChar char="•"/>
               <a:lnSpc>
                 <a:spcPts val="2200"/>
@@ -6559,10 +6623,12 @@
           </a:bodyPr>
           <a:lstStyle/>
           <a:p>
-            <a:pPr>
+            <a:pPr lvl="0" marL="457200" indent="-228600">
+              <a:buFont typeface="Calibri"/>
               <a:spcAft>
                 <a:spcPts val="1000"/>
               </a:spcAft>
+              <a:buSzPct val="100000"/>
               <a:buChar char="•"/>
               <a:lnSpc>
                 <a:spcPts val="2200"/>
@@ -6579,10 +6645,12 @@
             </a:r>
           </a:p>
           <a:p>
-            <a:pPr>
+            <a:pPr lvl="0" marL="457200" indent="-228600">
+              <a:buFont typeface="Calibri"/>
               <a:spcAft>
                 <a:spcPts val="1000"/>
               </a:spcAft>
+              <a:buSzPct val="100000"/>
               <a:buChar char="•"/>
               <a:lnSpc>
                 <a:spcPts val="2200"/>
@@ -6599,10 +6667,12 @@
             </a:r>
           </a:p>
           <a:p>
-            <a:pPr>
+            <a:pPr lvl="0" marL="457200" indent="-228600">
+              <a:buFont typeface="Calibri"/>
               <a:spcAft>
                 <a:spcPts val="1000"/>
               </a:spcAft>
+              <a:buSzPct val="100000"/>
               <a:buChar char="•"/>
               <a:lnSpc>
                 <a:spcPts val="2200"/>
@@ -6738,10 +6808,12 @@
           </a:bodyPr>
           <a:lstStyle/>
           <a:p>
-            <a:pPr>
+            <a:pPr lvl="0" marL="457200" indent="-228600">
+              <a:buFont typeface="Calibri"/>
               <a:spcAft>
                 <a:spcPts val="1000"/>
               </a:spcAft>
+              <a:buSzPct val="100000"/>
               <a:buChar char="•"/>
               <a:lnSpc>
                 <a:spcPts val="2200"/>
@@ -6758,10 +6830,12 @@
             </a:r>
           </a:p>
           <a:p>
-            <a:pPr>
+            <a:pPr lvl="0" marL="457200" indent="-228600">
+              <a:buFont typeface="Calibri"/>
               <a:spcAft>
                 <a:spcPts val="1000"/>
               </a:spcAft>
+              <a:buSzPct val="100000"/>
               <a:buChar char="•"/>
               <a:lnSpc>
                 <a:spcPts val="2200"/>
